--- a/reports/slides.pptx
+++ b/reports/slides.pptx
@@ -861,7 +861,7 @@
           <a:lstStyle/>
           <a:p>
             <a:r>
-              <a:t>Step 3. Each AutoML tool got the same training split, ROC-AUC as the metric, 16 threads on the laptop and a 20-minute budget. On test_future AUC, AutoGluon is statistically tied with our tuned LightGBM, and FLAML and H2O AutoML are slightly worse; no tool is more than 0.0011 AUC away. The big difference is cost: AutoGluon took 20.2 minutes against 76.0 for the manual search we selected, with no search space to design. Every winner is in effect one gradient-boosted tree model.</a:t>
+              <a:t>Step 3. Each AutoML tool got the same training split, ROC-AUC as the metric, 16 threads on the laptop and a 20-minute budget. On test_future AUC, AutoGluon is statistically tied with our tuned LightGBM, and FLAML and H2O AutoML are slightly worse; no tool is more than 0.0011 AUC away. The big difference is cost: AutoGluon took 20.2 minutes against 76.0 for the manual search we selected and its refit, with no search space to design. Every winner is in effect one gradient-boosted tree model.</a:t>
             </a:r>
           </a:p>
         </p:txBody>
@@ -1141,7 +1141,7 @@
           <a:lstStyle/>
           <a:p>
             <a:r>
-              <a:t>Deployment. The tuned LightGBM is served by a FastAPI service and a Streamlit app; you can pick a test_future file or upload a PE file, and the app shows the score, the verdict and the top SHAP reasons. The threshold was chosen on train out-of-fold scores so that a missed malware costs 10 times a false alarm; on test_future that gives 99.5% recall at 7.4% false-positive rate. It is a triage aid, and the app says so; the model card lists the limits.</a:t>
+              <a:t>Deployment. The tuned LightGBM is served by a FastAPI service and a Streamlit app; you can pick a test_future file or upload a PE file, and the app shows the score, the verdict and the top SHAP reasons. The threshold was chosen on train out-of-fold scores so that a missed malware costs 10 times a false alarm; on test_future that gives 99.5% recall at 7.4% false-positive rate, but at a realistic 1% malware share only about 12% of its alarms would be real malware. So it is a triage aid, not a blocker, and the app says so; the model card lists the limits.</a:t>
             </a:r>
           </a:p>
         </p:txBody>
@@ -4566,20 +4566,12 @@
           </a:bodyPr>
           <a:lstStyle/>
           <a:p>
-            <a:pPr algn="l">
+            <a:pPr algn="l" marL="217170" indent="-217170">
               <a:spcAft>
                 <a:spcPts val="800"/>
               </a:spcAft>
+              <a:buChar char="•"/>
             </a:pPr>
-            <a:r>
-              <a:rPr sz="1900" b="0">
-                <a:solidFill>
-                  <a:srgbClr val="1F2A44"/>
-                </a:solidFill>
-                <a:latin typeface="Calibri"/>
-              </a:rPr>
-              <a:t>• </a:t>
-            </a:r>
             <a:r>
               <a:rPr sz="1900" b="0">
                 <a:solidFill>
@@ -4591,10 +4583,11 @@
             </a:r>
           </a:p>
           <a:p>
-            <a:pPr algn="l">
+            <a:pPr algn="l" marL="217170" indent="-217170">
               <a:spcAft>
                 <a:spcPts val="800"/>
               </a:spcAft>
+              <a:buChar char="•"/>
             </a:pPr>
             <a:r>
               <a:rPr sz="1900" b="0">
@@ -4603,33 +4596,16 @@
                 </a:solidFill>
                 <a:latin typeface="Calibri"/>
               </a:rPr>
-              <a:t>• </a:t>
-            </a:r>
-            <a:r>
-              <a:rPr sz="1900" b="0">
-                <a:solidFill>
-                  <a:srgbClr val="1F2A44"/>
-                </a:solidFill>
-                <a:latin typeface="Calibri"/>
-              </a:rPr>
-              <a:t>Random split overstates little by AUC (0.0010), a lot by precision at 1% prevalence (44.7% on future files).</a:t>
-            </a:r>
-          </a:p>
-          <a:p>
-            <a:pPr algn="l">
+              <a:t>The random split overstates little by AUC (0.0010); the 50/50 test mix overstates a lot: precision 98.8% vs 44.7% at 1% malware on future files.</a:t>
+            </a:r>
+          </a:p>
+          <a:p>
+            <a:pPr algn="l" marL="217170" indent="-217170">
               <a:spcAft>
                 <a:spcPts val="800"/>
               </a:spcAft>
+              <a:buChar char="•"/>
             </a:pPr>
-            <a:r>
-              <a:rPr sz="1900" b="0">
-                <a:solidFill>
-                  <a:srgbClr val="1F2A44"/>
-                </a:solidFill>
-                <a:latin typeface="Calibri"/>
-              </a:rPr>
-              <a:t>• </a:t>
-            </a:r>
             <a:r>
               <a:rPr sz="1900" b="0">
                 <a:solidFill>
@@ -4641,10 +4617,11 @@
             </a:r>
           </a:p>
           <a:p>
-            <a:pPr algn="l">
+            <a:pPr algn="l" marL="217170" indent="-217170">
               <a:spcAft>
                 <a:spcPts val="800"/>
               </a:spcAft>
+              <a:buChar char="•"/>
             </a:pPr>
             <a:r>
               <a:rPr sz="1900" b="0">
@@ -4653,16 +4630,7 @@
                 </a:solidFill>
                 <a:latin typeface="Calibri"/>
               </a:rPr>
-              <a:t>• </a:t>
-            </a:r>
-            <a:r>
-              <a:rPr sz="1900" b="0">
-                <a:solidFill>
-                  <a:srgbClr val="1F2A44"/>
-                </a:solidFill>
-                <a:latin typeface="Calibri"/>
-              </a:rPr>
-              <a:t>The hard tail: 53.7% of challenge-set malware caught.</a:t>
+              <a:t>The hard tail: 53.7% of challenge-set malware caught at 1% FPR (79.9% at the deployed threshold).</a:t>
             </a:r>
           </a:p>
         </p:txBody>
@@ -4728,20 +4696,12 @@
           </a:bodyPr>
           <a:lstStyle/>
           <a:p>
-            <a:pPr algn="l">
+            <a:pPr algn="l" marL="217170" indent="-217170">
               <a:spcAft>
                 <a:spcPts val="800"/>
               </a:spcAft>
+              <a:buChar char="•"/>
             </a:pPr>
-            <a:r>
-              <a:rPr sz="1900" b="0">
-                <a:solidFill>
-                  <a:srgbClr val="1F2A44"/>
-                </a:solidFill>
-                <a:latin typeface="Calibri"/>
-              </a:rPr>
-              <a:t>• </a:t>
-            </a:r>
             <a:r>
               <a:rPr sz="1900" b="0">
                 <a:solidFill>
@@ -4753,20 +4713,12 @@
             </a:r>
           </a:p>
           <a:p>
-            <a:pPr algn="l">
+            <a:pPr algn="l" marL="217170" indent="-217170">
               <a:spcAft>
                 <a:spcPts val="800"/>
               </a:spcAft>
+              <a:buChar char="•"/>
             </a:pPr>
-            <a:r>
-              <a:rPr sz="1900" b="0">
-                <a:solidFill>
-                  <a:srgbClr val="1F2A44"/>
-                </a:solidFill>
-                <a:latin typeface="Calibri"/>
-              </a:rPr>
-              <a:t>• </a:t>
-            </a:r>
             <a:r>
               <a:rPr sz="1900" b="0">
                 <a:solidFill>
@@ -4778,20 +4730,12 @@
             </a:r>
           </a:p>
           <a:p>
-            <a:pPr algn="l">
+            <a:pPr algn="l" marL="217170" indent="-217170">
               <a:spcAft>
                 <a:spcPts val="800"/>
               </a:spcAft>
+              <a:buChar char="•"/>
             </a:pPr>
-            <a:r>
-              <a:rPr sz="1900" b="0">
-                <a:solidFill>
-                  <a:srgbClr val="1F2A44"/>
-                </a:solidFill>
-                <a:latin typeface="Calibri"/>
-              </a:rPr>
-              <a:t>• </a:t>
-            </a:r>
             <a:r>
               <a:rPr sz="1900" b="0">
                 <a:solidFill>
@@ -4803,10 +4747,11 @@
             </a:r>
           </a:p>
           <a:p>
-            <a:pPr algn="l">
+            <a:pPr algn="l" marL="217170" indent="-217170">
               <a:spcAft>
                 <a:spcPts val="800"/>
               </a:spcAft>
+              <a:buChar char="•"/>
             </a:pPr>
             <a:r>
               <a:rPr sz="1900" b="0">
@@ -4815,16 +4760,7 @@
                 </a:solidFill>
                 <a:latin typeface="Calibri"/>
               </a:rPr>
-              <a:t>• </a:t>
-            </a:r>
-            <a:r>
-              <a:rPr sz="1900" b="0">
-                <a:solidFill>
-                  <a:srgbClr val="1F2A44"/>
-                </a:solidFill>
-                <a:latin typeface="Calibri"/>
-              </a:rPr>
-              <a:t>Step 4 ran on a 4-core / 15 GB cloud VM (600 s AutoML budget), Steps 2-3 on the 16-core laptop.</a:t>
+              <a:t>Step 4 ran on a 4-core / 15.7 GiB cloud VM (600 s AutoML budget), Steps 2-3 on the 16-core laptop.</a:t>
             </a:r>
           </a:p>
         </p:txBody>
@@ -5517,20 +5453,12 @@
           </a:bodyPr>
           <a:lstStyle/>
           <a:p>
-            <a:pPr algn="l">
+            <a:pPr algn="l" marL="205740" indent="-205740">
               <a:spcAft>
                 <a:spcPts val="800"/>
               </a:spcAft>
+              <a:buChar char="•"/>
             </a:pPr>
-            <a:r>
-              <a:rPr sz="1800" b="0">
-                <a:solidFill>
-                  <a:srgbClr val="5F6673"/>
-                </a:solidFill>
-                <a:latin typeface="Calibri"/>
-              </a:rPr>
-              <a:t>• </a:t>
-            </a:r>
             <a:r>
               <a:rPr sz="1800" b="0">
                 <a:solidFill>
@@ -5542,20 +5470,12 @@
             </a:r>
           </a:p>
           <a:p>
-            <a:pPr algn="l">
+            <a:pPr algn="l" marL="205740" indent="-205740">
               <a:spcAft>
                 <a:spcPts val="800"/>
               </a:spcAft>
+              <a:buChar char="•"/>
             </a:pPr>
-            <a:r>
-              <a:rPr sz="1800" b="0">
-                <a:solidFill>
-                  <a:srgbClr val="5F6673"/>
-                </a:solidFill>
-                <a:latin typeface="Calibri"/>
-              </a:rPr>
-              <a:t>• </a:t>
-            </a:r>
             <a:r>
               <a:rPr sz="1800" b="0">
                 <a:solidFill>
@@ -5567,20 +5487,12 @@
             </a:r>
           </a:p>
           <a:p>
-            <a:pPr algn="l">
+            <a:pPr algn="l" marL="205740" indent="-205740">
               <a:spcAft>
                 <a:spcPts val="800"/>
               </a:spcAft>
+              <a:buChar char="•"/>
             </a:pPr>
-            <a:r>
-              <a:rPr sz="1800" b="0">
-                <a:solidFill>
-                  <a:srgbClr val="5F6673"/>
-                </a:solidFill>
-                <a:latin typeface="Calibri"/>
-              </a:rPr>
-              <a:t>• </a:t>
-            </a:r>
             <a:r>
               <a:rPr sz="1800" b="0">
                 <a:solidFill>
@@ -6185,7 +6097,7 @@
         </p:nvSpPr>
         <p:spPr>
           <a:xfrm>
-            <a:off x="457200" y="3840480"/>
+            <a:off x="9153144" y="3840480"/>
             <a:ext cx="2514600" cy="1600200"/>
           </a:xfrm>
           <a:prstGeom prst="roundRect">
@@ -6267,16 +6179,16 @@
       </p:sp>
       <p:sp>
         <p:nvSpPr>
-          <p:cNvPr id="13" name="Right Arrow 12"/>
+          <p:cNvPr id="13" name="Left Arrow 12"/>
           <p:cNvSpPr/>
           <p:nvPr/>
         </p:nvSpPr>
         <p:spPr>
           <a:xfrm>
-            <a:off x="3017520" y="4503420"/>
+            <a:off x="8814816" y="4503420"/>
             <a:ext cx="292608" cy="274320"/>
           </a:xfrm>
-          <a:prstGeom prst="rightArrow">
+          <a:prstGeom prst="leftArrow">
             <a:avLst/>
           </a:prstGeom>
           <a:solidFill>
@@ -6316,7 +6228,7 @@
         </p:nvSpPr>
         <p:spPr>
           <a:xfrm>
-            <a:off x="3355848" y="3840480"/>
+            <a:off x="6254496" y="3840480"/>
             <a:ext cx="2514600" cy="1600200"/>
           </a:xfrm>
           <a:prstGeom prst="roundRect">
@@ -6398,7 +6310,7 @@
       </p:sp>
       <p:sp>
         <p:nvSpPr>
-          <p:cNvPr id="15" name="Right Arrow 14"/>
+          <p:cNvPr id="15" name="Left Arrow 14"/>
           <p:cNvSpPr/>
           <p:nvPr/>
         </p:nvSpPr>
@@ -6407,7 +6319,7 @@
             <a:off x="5916168" y="4503420"/>
             <a:ext cx="292608" cy="274320"/>
           </a:xfrm>
-          <a:prstGeom prst="rightArrow">
+          <a:prstGeom prst="leftArrow">
             <a:avLst/>
           </a:prstGeom>
           <a:solidFill>
@@ -6447,7 +6359,7 @@
         </p:nvSpPr>
         <p:spPr>
           <a:xfrm>
-            <a:off x="6254496" y="3840480"/>
+            <a:off x="3355848" y="3840480"/>
             <a:ext cx="2514600" cy="1600200"/>
           </a:xfrm>
           <a:prstGeom prst="roundRect">
@@ -6529,16 +6441,16 @@
       </p:sp>
       <p:sp>
         <p:nvSpPr>
-          <p:cNvPr id="17" name="Right Arrow 16"/>
+          <p:cNvPr id="17" name="Left Arrow 16"/>
           <p:cNvSpPr/>
           <p:nvPr/>
         </p:nvSpPr>
         <p:spPr>
           <a:xfrm>
-            <a:off x="8814816" y="4503420"/>
+            <a:off x="3017520" y="4503420"/>
             <a:ext cx="292608" cy="274320"/>
           </a:xfrm>
-          <a:prstGeom prst="rightArrow">
+          <a:prstGeom prst="leftArrow">
             <a:avLst/>
           </a:prstGeom>
           <a:solidFill>
@@ -6578,7 +6490,7 @@
         </p:nvSpPr>
         <p:spPr>
           <a:xfrm>
-            <a:off x="9153144" y="3840480"/>
+            <a:off x="457200" y="3840480"/>
             <a:ext cx="2514600" cy="1600200"/>
           </a:xfrm>
           <a:prstGeom prst="roundRect">
@@ -9038,7 +8950,7 @@
                 </a:solidFill>
                 <a:latin typeface="Calibri"/>
               </a:rPr>
-              <a:t>AutoGluon 20.2 min vs 76.0 min for the selected manual search; all three beat untuned LightGBM.</a:t>
+              <a:t>AutoGluon 20.2 min vs 76.0 min for the selected manual search and refit; all three beat untuned LightGBM.</a:t>
             </a:r>
           </a:p>
         </p:txBody>
@@ -9865,7 +9777,7 @@
                 </a:solidFill>
                 <a:latin typeface="Calibri"/>
               </a:rPr>
-              <a:t>only 53.7% of challenge-set malware is caught.</a:t>
+              <a:t>only 53.7% of challenge-set malware is caught at this threshold (79.9% at the deployed, recall-oriented one).</a:t>
             </a:r>
           </a:p>
         </p:txBody>
@@ -10004,7 +9916,7 @@
                 </a:solidFill>
                 <a:latin typeface="Calibri"/>
               </a:rPr>
-              <a:t>Source: reports/tables/leakage.csv, automl_self_estimate.csv; Step 4 ran on a 4-core / 15 GB Linux VM, 600 s per AutoML run</a:t>
+              <a:t>Source: reports/tables/leakage.csv, automl_self_estimate.csv; Step 4 ran on a 4-core / 15.7 GiB RAM Linux VM, 600 s per AutoML run</a:t>
             </a:r>
           </a:p>
         </p:txBody>
@@ -10837,7 +10749,7 @@
       </p:sp>
       <p:pic>
         <p:nvPicPr>
-          <p:cNvPr id="5" name="Picture 4" descr="shap_family_bar.png"/>
+          <p:cNvPr id="5" name="Picture 4" descr="image.png"/>
           <p:cNvPicPr>
             <a:picLocks noChangeAspect="1"/>
           </p:cNvPicPr>
@@ -11123,7 +11035,7 @@
       </p:sp>
       <p:pic>
         <p:nvPicPr>
-          <p:cNvPr id="5" name="Picture 4" descr="a_malicious_correct.png"/>
+          <p:cNvPr id="5" name="Picture 4" descr="image.png"/>
           <p:cNvPicPr>
             <a:picLocks noChangeAspect="1"/>
           </p:cNvPicPr>
@@ -11131,15 +11043,14 @@
         </p:nvPicPr>
         <p:blipFill>
           <a:blip r:embed="rId3"/>
-          <a:srcRect b="45000"/>
           <a:stretch>
             <a:fillRect/>
           </a:stretch>
         </p:blipFill>
         <p:spPr>
           <a:xfrm>
-            <a:off x="457200" y="1628775"/>
-            <a:ext cx="6035040" cy="4149090"/>
+            <a:off x="457200" y="1324555"/>
+            <a:ext cx="6400800" cy="4757530"/>
           </a:xfrm>
           <a:prstGeom prst="rect">
             <a:avLst/>
@@ -11154,8 +11065,8 @@
         </p:nvSpPr>
         <p:spPr>
           <a:xfrm>
-            <a:off x="6766560" y="1188720"/>
-            <a:ext cx="4937760" cy="5120640"/>
+            <a:off x="7132320" y="1188720"/>
+            <a:ext cx="4572000" cy="5120640"/>
           </a:xfrm>
           <a:prstGeom prst="rect">
             <a:avLst/>
@@ -11264,7 +11175,7 @@
                 </a:solidFill>
                 <a:latin typeface="Calibri"/>
               </a:rPr>
-              <a:t>recall 99.5%, FPR 7.4%.</a:t>
+              <a:t>recall 99.5%, FPR 7.4%; at 1% malware ~12% precision, so triage, not blocking.</a:t>
             </a:r>
           </a:p>
         </p:txBody>

--- a/reports/slides.pptx
+++ b/reports/slides.pptx
@@ -1141,7 +1141,7 @@
           <a:lstStyle/>
           <a:p>
             <a:r>
-              <a:t>Deployment. The tuned LightGBM is served by a FastAPI service and a Streamlit app; you can pick a test_future file or upload a PE file, and the app shows the score, the verdict and the top SHAP reasons. The threshold was chosen on train out-of-fold scores so that a missed malware costs 10 times a false alarm; on test_future that gives 99.5% recall at 7.4% false-positive rate, but at a realistic 1% malware share only about 12% of its alarms would be real malware. So it is a triage aid, not a blocker, and the app says so; the model card lists the limits.</a:t>
+              <a:t>Deployment. The tuned LightGBM is served by a FastAPI service and a one-page Streamlit app; you pick an example file or upload a program, and the page shows the verdict and, in plain words, which parts of the file pushed the decision. The threshold was chosen on train out-of-fold scores so that a missed malware costs 10 times a false alarm; on test_future that gives 99.5% recall at 7.4% false-positive rate, but at a realistic 1% malware share only about 12% of its alarms would be real malware. So it is a triage aid, not a blocker, and the app says so; the model card lists the limits.</a:t>
             </a:r>
           </a:p>
         </p:txBody>
@@ -11049,8 +11049,8 @@
         </p:blipFill>
         <p:spPr>
           <a:xfrm>
-            <a:off x="457200" y="1324555"/>
-            <a:ext cx="6400800" cy="4757530"/>
+            <a:off x="682119" y="1051560"/>
+            <a:ext cx="5950962" cy="5303520"/>
           </a:xfrm>
           <a:prstGeom prst="rect">
             <a:avLst/>
@@ -11125,7 +11125,7 @@
                 </a:solidFill>
                 <a:latin typeface="Calibri"/>
               </a:rPr>
-              <a:t>pick a test_future file or upload a PE; shows P(malicious), verdict and top SHAP reasons.</a:t>
+              <a:t>one page: pick an example or upload a PE; shows the verdict and the top reasons (SHAP) in plain words.</a:t>
             </a:r>
           </a:p>
           <a:p>

--- a/reports/slides.pptx
+++ b/reports/slides.pptx
@@ -1141,7 +1141,7 @@
           <a:lstStyle/>
           <a:p>
             <a:r>
-              <a:t>Deployment. The tuned LightGBM is served by a FastAPI service and a one-page Streamlit app; you pick an example file or upload a program, and the page shows the verdict and, in plain words, which parts of the file pushed the decision. The threshold was chosen on train out-of-fold scores so that a missed malware costs 10 times a false alarm; on test_future that gives 99.5% recall at 7.4% false-positive rate, but at a realistic 1% malware share only about 12% of its alarms would be real malware. So it is a triage aid, not a blocker, and the app says so; the model card lists the limits.</a:t>
+              <a:t>Deployment. The tuned LightGBM is served by a FastAPI service and a one-page Streamlit app that walks through the whole project; in its live demo you pick an example file or upload a program, and the page shows the verdict and, in plain words, which parts of the file pushed the decision. The threshold was chosen on train out-of-fold scores so that a missed malware costs 10 times a false alarm; on test_future that gives 99.5% recall at 7.4% false-positive rate, but at a realistic 1% malware share only about 12% of its alarms would be real malware. So it is a triage aid, not a blocker, and the app says so; the model card lists the limits.</a:t>
             </a:r>
           </a:p>
         </p:txBody>
@@ -11049,8 +11049,8 @@
         </p:blipFill>
         <p:spPr>
           <a:xfrm>
-            <a:off x="682119" y="1051560"/>
-            <a:ext cx="5950962" cy="5303520"/>
+            <a:off x="600611" y="1051560"/>
+            <a:ext cx="6113977" cy="5303520"/>
           </a:xfrm>
           <a:prstGeom prst="rect">
             <a:avLst/>
